--- a/module-1/TheTechnologyValueStreamCSD380.pptx
+++ b/module-1/TheTechnologyValueStreamCSD380.pptx
@@ -145,7 +145,7 @@
               <c:strCache>
                 <c:ptCount val="1"/>
                 <c:pt idx="0">
-                  <c:v>Relative deployment frequency</c:v>
+                  <c:v>Deployments per day</c:v>
                 </c:pt>
               </c:strCache>
             </c:strRef>
@@ -200,10 +200,10 @@
               <c:strCache>
                 <c:ptCount val="2"/>
                 <c:pt idx="0">
-                  <c:v>Low performers</c:v>
+                  <c:v>2011</c:v>
                 </c:pt>
                 <c:pt idx="1">
-                  <c:v>Elite performers</c:v>
+                  <c:v>2015</c:v>
                 </c:pt>
               </c:strCache>
             </c:strRef>
@@ -215,17 +215,17 @@
                 <c:formatCode>General</c:formatCode>
                 <c:ptCount val="2"/>
                 <c:pt idx="0">
-                  <c:v>1</c:v>
+                  <c:v>7000</c:v>
                 </c:pt>
                 <c:pt idx="1">
-                  <c:v>208</c:v>
+                  <c:v>130000</c:v>
                 </c:pt>
               </c:numCache>
             </c:numRef>
           </c:val>
           <c:extLst>
             <c:ext xmlns:c16="http://schemas.microsoft.com/office/drawing/2014/chart" uri="{C3380CC4-5D6E-409C-BE32-E72D297353CC}">
-              <c16:uniqueId val="{00000000-41E0-3C44-80DC-55F6AEB5FD74}"/>
+              <c16:uniqueId val="{00000000-EDE8-F94C-A8DC-A4C73060C88E}"/>
             </c:ext>
           </c:extLst>
         </c:ser>
@@ -322,7 +322,7 @@
                     </a:solidFill>
                     <a:latin typeface="Calibri"/>
                   </a:rPr>
-                  <a:t>Relative deployment frequency (index, low = 1)</a:t>
+                  <a:t>Deployments per day</a:t>
                 </a:r>
               </a:p>
             </c:rich>
@@ -411,7 +411,7 @@
     </p:spTree>
     <p:extLst>
       <p:ext uri="{BB962C8B-B14F-4D97-AF65-F5344CB8AC3E}">
-        <p14:creationId xmlns:p14="http://schemas.microsoft.com/office/powerpoint/2010/main" val="2345187320"/>
+        <p14:creationId xmlns:p14="http://schemas.microsoft.com/office/powerpoint/2010/main" val="1436539966"/>
       </p:ext>
     </p:extLst>
   </p:cSld>
@@ -1910,7 +1910,6 @@
                   <a:srgbClr val="C9C4AE"/>
                 </a:solidFill>
                 <a:latin typeface="Calibri" pitchFamily="34" charset="0"/>
-                <a:ea typeface="Calibri" pitchFamily="34" charset="-122"/>
                 <a:cs typeface="Calibri" pitchFamily="34" charset="-120"/>
               </a:rPr>
               <a:t>CSD380 DevOps</a:t>
@@ -1952,7 +1951,7 @@
                 <a:ea typeface="Calibri" pitchFamily="34" charset="-122"/>
                 <a:cs typeface="Calibri" pitchFamily="34" charset="-120"/>
               </a:rPr>
-              <a:t>Tanner Elston – September 9, 2026</a:t>
+              <a:t>Tanner Elston  ·  September 9, 2026</a:t>
             </a:r>
             <a:endParaRPr lang="en-US" sz="1500" dirty="0"/>
           </a:p>
@@ -2141,7 +2140,7 @@
                 <a:ea typeface="Calibri" pitchFamily="34" charset="-122"/>
                 <a:cs typeface="Calibri" pitchFamily="34" charset="-120"/>
               </a:rPr>
-              <a:t>lead time, process time, and %C/A jointly describe delivery health, and the performers who deploy most often also report the lowest failure rates.</a:t>
+              <a:t>lead time, process time, and %C/A jointly describe delivery health across the whole value stream, not just how fast code ships.</a:t>
             </a:r>
             <a:endParaRPr lang="en-US" sz="1900" dirty="0"/>
           </a:p>
@@ -2175,7 +2174,7 @@
                 <a:ea typeface="Calibri" pitchFamily="34" charset="-122"/>
                 <a:cs typeface="Calibri" pitchFamily="34" charset="-120"/>
               </a:rPr>
-              <a:t>through automation, small batches, and modular architecture — not through working harder within the same process.</a:t>
+              <a:t>through automation, small batches, and modular architecture, not through working harder within the same process.</a:t>
             </a:r>
             <a:endParaRPr lang="en-US" sz="1900" dirty="0"/>
           </a:p>
@@ -2340,53 +2339,74 @@
           <a:bodyPr wrap="square" lIns="0" tIns="0" rIns="0" bIns="0" rtlCol="0" anchor="t"/>
           <a:lstStyle/>
           <a:p>
-            <a:pPr marL="0" indent="0">
+            <a:pPr>
               <a:spcAft>
                 <a:spcPts val="600"/>
               </a:spcAft>
-              <a:buNone/>
-            </a:pPr>
-            <a:r>
-              <a:rPr lang="en-US" sz="1400" dirty="0">
-                <a:solidFill>
-                  <a:srgbClr val="2D2D2D"/>
-                </a:solidFill>
-                <a:latin typeface="Calibri" pitchFamily="34" charset="0"/>
-                <a:ea typeface="Calibri" pitchFamily="34" charset="-122"/>
-                <a:cs typeface="Calibri" pitchFamily="34" charset="-120"/>
-              </a:rPr>
-              <a:t>Forsgren, N., Humble, J., &amp; Kim, G. (2019). Accelerate State of DevOps Report. DORA / Google Cloud.</a:t>
-            </a:r>
-            <a:endParaRPr lang="en-US" sz="1400" dirty="0"/>
-          </a:p>
-          <a:p>
-            <a:pPr marL="0" indent="0">
+            </a:pPr>
+            <a:endParaRPr lang="en-US" sz="1400" dirty="0">
+              <a:solidFill>
+                <a:srgbClr val="2D2D2D"/>
+              </a:solidFill>
+              <a:latin typeface="Calibri" pitchFamily="34" charset="0"/>
+              <a:ea typeface="Calibri" pitchFamily="34" charset="-122"/>
+              <a:cs typeface="Calibri" pitchFamily="34" charset="-120"/>
+            </a:endParaRPr>
+          </a:p>
+          <a:p>
+            <a:pPr>
               <a:spcAft>
                 <a:spcPts val="600"/>
               </a:spcAft>
-              <a:buNone/>
-            </a:pPr>
-            <a:endParaRPr lang="en-US" sz="1400" dirty="0"/>
-          </a:p>
-          <a:p>
-            <a:pPr marL="0" indent="0">
+            </a:pPr>
+            <a:r>
+              <a:rPr lang="en-US" sz="1400" dirty="0">
+                <a:solidFill>
+                  <a:srgbClr val="2D2D2D"/>
+                </a:solidFill>
+                <a:latin typeface="Calibri" pitchFamily="34" charset="0"/>
+                <a:ea typeface="Calibri" pitchFamily="34" charset="-122"/>
+                <a:cs typeface="Calibri" pitchFamily="34" charset="-120"/>
+              </a:rPr>
+              <a:t>Forsgren, N., Humble, J., &amp; Kim, G. (2019). Accelerate State of DevOps Report. DORA / Google Cloud. https://</a:t>
+            </a:r>
+            <a:r>
+              <a:rPr lang="en-US" sz="1400" dirty="0" err="1">
+                <a:solidFill>
+                  <a:srgbClr val="2D2D2D"/>
+                </a:solidFill>
+                <a:latin typeface="Calibri" pitchFamily="34" charset="0"/>
+                <a:ea typeface="Calibri" pitchFamily="34" charset="-122"/>
+                <a:cs typeface="Calibri" pitchFamily="34" charset="-120"/>
+              </a:rPr>
+              <a:t>research.google</a:t>
+            </a:r>
+            <a:r>
+              <a:rPr lang="en-US" sz="1400" dirty="0">
+                <a:solidFill>
+                  <a:srgbClr val="2D2D2D"/>
+                </a:solidFill>
+                <a:latin typeface="Calibri" pitchFamily="34" charset="0"/>
+                <a:ea typeface="Calibri" pitchFamily="34" charset="-122"/>
+                <a:cs typeface="Calibri" pitchFamily="34" charset="-120"/>
+              </a:rPr>
+              <a:t>/pubs/2019-accelerate-state-of-devops-report/</a:t>
+            </a:r>
+          </a:p>
+          <a:p>
+            <a:pPr>
               <a:spcAft>
                 <a:spcPts val="600"/>
               </a:spcAft>
-              <a:buNone/>
-            </a:pPr>
-            <a:r>
-              <a:rPr lang="en-US" sz="1400" dirty="0">
-                <a:solidFill>
-                  <a:srgbClr val="2D2D2D"/>
-                </a:solidFill>
-                <a:latin typeface="Calibri" pitchFamily="34" charset="0"/>
-                <a:ea typeface="Calibri" pitchFamily="34" charset="-122"/>
-                <a:cs typeface="Calibri" pitchFamily="34" charset="-120"/>
-              </a:rPr>
-              <a:t>Forsgren, N., Humble, J., &amp; Kim, G. (2018). Accelerate: The Science of Lean Software and DevOps. IT Revolution Press.</a:t>
-            </a:r>
-            <a:endParaRPr lang="en-US" sz="1400" dirty="0"/>
+            </a:pPr>
+            <a:endParaRPr lang="en-US" sz="1400" dirty="0">
+              <a:solidFill>
+                <a:srgbClr val="2D2D2D"/>
+              </a:solidFill>
+              <a:latin typeface="Calibri" pitchFamily="34" charset="0"/>
+              <a:ea typeface="Calibri" pitchFamily="34" charset="-122"/>
+              <a:cs typeface="Calibri" pitchFamily="34" charset="-120"/>
+            </a:endParaRPr>
           </a:p>
           <a:p>
             <a:pPr marL="0" indent="0">
@@ -2395,7 +2415,17 @@
               </a:spcAft>
               <a:buNone/>
             </a:pPr>
-            <a:endParaRPr lang="en-US" sz="1400" dirty="0"/>
+            <a:r>
+              <a:rPr lang="en-US" sz="1400" dirty="0">
+                <a:solidFill>
+                  <a:srgbClr val="2D2D2D"/>
+                </a:solidFill>
+                <a:latin typeface="Calibri" pitchFamily="34" charset="0"/>
+                <a:ea typeface="Calibri" pitchFamily="34" charset="-122"/>
+                <a:cs typeface="Calibri" pitchFamily="34" charset="-120"/>
+              </a:rPr>
+              <a:t>Kim, G., Humble, J., Debois, P., &amp; Willis, J. (2016). The DevOps Handbook: How to Create World-Class Agility, Reliability, and Security in Technology Organizations. IT Revolution Press.</a:t>
+            </a:r>
           </a:p>
           <a:p>
             <a:pPr marL="0" indent="0">
@@ -2404,27 +2434,48 @@
               </a:spcAft>
               <a:buNone/>
             </a:pPr>
-            <a:r>
-              <a:rPr lang="en-US" sz="1400" dirty="0">
-                <a:solidFill>
-                  <a:srgbClr val="2D2D2D"/>
-                </a:solidFill>
-                <a:latin typeface="Calibri" pitchFamily="34" charset="0"/>
-                <a:ea typeface="Calibri" pitchFamily="34" charset="-122"/>
-                <a:cs typeface="Calibri" pitchFamily="34" charset="-120"/>
-              </a:rPr>
-              <a:t>Kim, G., Humble, J., Debois, P., &amp; Willis, J. (2016). The DevOps Handbook: How to Create World-Class Agility, Reliability, and Security in Technology Organizations. IT Revolution Press.</a:t>
-            </a:r>
-            <a:endParaRPr lang="en-US" sz="1400" dirty="0"/>
-          </a:p>
-          <a:p>
-            <a:pPr marL="0" indent="0">
+            <a:endParaRPr lang="en-US" sz="1400" dirty="0">
+              <a:solidFill>
+                <a:srgbClr val="2D2D2D"/>
+              </a:solidFill>
+              <a:latin typeface="Calibri" pitchFamily="34" charset="0"/>
+              <a:ea typeface="Calibri" pitchFamily="34" charset="-122"/>
+              <a:cs typeface="Calibri" pitchFamily="34" charset="-120"/>
+            </a:endParaRPr>
+          </a:p>
+          <a:p>
+            <a:pPr>
               <a:spcAft>
                 <a:spcPts val="600"/>
               </a:spcAft>
-              <a:buNone/>
-            </a:pPr>
-            <a:endParaRPr lang="en-US" sz="1400" dirty="0"/>
+            </a:pPr>
+            <a:r>
+              <a:rPr lang="en-US" sz="1400" dirty="0"/>
+              <a:t>Kim, G. (2012). "The Three Ways: The Principles Underpinning DevOps." IT Revolution Press blog. https://</a:t>
+            </a:r>
+            <a:r>
+              <a:rPr lang="en-US" sz="1400" dirty="0" err="1"/>
+              <a:t>itrevolution.com</a:t>
+            </a:r>
+            <a:r>
+              <a:rPr lang="en-US" sz="1400" dirty="0"/>
+              <a:t>/articles/the-three-ways-principles-underpinning-</a:t>
+            </a:r>
+            <a:r>
+              <a:rPr lang="en-US" sz="1400" dirty="0" err="1"/>
+              <a:t>devops</a:t>
+            </a:r>
+            <a:r>
+              <a:rPr lang="en-US" sz="1400" dirty="0"/>
+              <a:t>/</a:t>
+            </a:r>
+            <a:endParaRPr lang="en-US" sz="1400" dirty="0">
+              <a:solidFill>
+                <a:srgbClr val="2D2D2D"/>
+              </a:solidFill>
+              <a:latin typeface="Calibri" pitchFamily="34" charset="0"/>
+              <a:cs typeface="Calibri" pitchFamily="34" charset="-120"/>
+            </a:endParaRPr>
           </a:p>
           <a:p>
             <a:pPr marL="0" indent="0">
@@ -2433,46 +2484,6 @@
               </a:spcAft>
               <a:buNone/>
             </a:pPr>
-            <a:r>
-              <a:rPr lang="en-US" sz="1400" dirty="0">
-                <a:solidFill>
-                  <a:srgbClr val="2D2D2D"/>
-                </a:solidFill>
-                <a:latin typeface="Calibri" pitchFamily="34" charset="0"/>
-                <a:ea typeface="Calibri" pitchFamily="34" charset="-122"/>
-                <a:cs typeface="Calibri" pitchFamily="34" charset="-120"/>
-              </a:rPr>
-              <a:t>Kim, G. (2012). The Three Ways: The Principles Underpinning DevOps. IT Revolution Press blog.</a:t>
-            </a:r>
-            <a:endParaRPr lang="en-US" sz="1400" dirty="0"/>
-          </a:p>
-          <a:p>
-            <a:pPr marL="0" indent="0">
-              <a:spcAft>
-                <a:spcPts val="600"/>
-              </a:spcAft>
-              <a:buNone/>
-            </a:pPr>
-            <a:endParaRPr lang="en-US" sz="1400" dirty="0"/>
-          </a:p>
-          <a:p>
-            <a:pPr marL="0" indent="0">
-              <a:spcAft>
-                <a:spcPts val="600"/>
-              </a:spcAft>
-              <a:buNone/>
-            </a:pPr>
-            <a:r>
-              <a:rPr lang="en-US" sz="1400" dirty="0">
-                <a:solidFill>
-                  <a:srgbClr val="2D2D2D"/>
-                </a:solidFill>
-                <a:latin typeface="Calibri" pitchFamily="34" charset="0"/>
-                <a:ea typeface="Calibri" pitchFamily="34" charset="-122"/>
-                <a:cs typeface="Calibri" pitchFamily="34" charset="-120"/>
-              </a:rPr>
-              <a:t>Martin, K., &amp; Osterling, M. (2013). Value Stream Mapping. McGraw-Hill Education.</a:t>
-            </a:r>
             <a:endParaRPr lang="en-US" sz="1400" dirty="0"/>
           </a:p>
         </p:txBody>
@@ -2658,7 +2669,7 @@
               <a:buNone/>
             </a:pPr>
             <a:r>
-              <a:rPr lang="en-US" sz="1700" b="1" dirty="0">
+              <a:rPr lang="en-US" sz="1700" dirty="0">
                 <a:solidFill>
                   <a:srgbClr val="2D2D2D"/>
                 </a:solidFill>
@@ -2666,18 +2677,7 @@
                 <a:ea typeface="Calibri" pitchFamily="34" charset="-122"/>
                 <a:cs typeface="Calibri" pitchFamily="34" charset="-120"/>
               </a:rPr>
-              <a:t>Elite performers: </a:t>
-            </a:r>
-            <a:r>
-              <a:rPr lang="en-US" sz="1700" dirty="0">
-                <a:solidFill>
-                  <a:srgbClr val="2D2D2D"/>
-                </a:solidFill>
-                <a:latin typeface="Calibri" pitchFamily="34" charset="0"/>
-                <a:ea typeface="Calibri" pitchFamily="34" charset="-122"/>
-                <a:cs typeface="Calibri" pitchFamily="34" charset="-120"/>
-              </a:rPr>
-              <a:t>deploy on demand, multiple times per day, and recover from failed changes in under an hour.</a:t>
+              <a:t>High-performing organizations such as Google, Amazon, Facebook, Etsy, and Netflix routinely and reliably deploy code into production hundreds, or even thousands, of times per day.</a:t>
             </a:r>
             <a:endParaRPr lang="en-US" sz="1700" dirty="0"/>
           </a:p>
@@ -2750,7 +2750,7 @@
               <a:buNone/>
             </a:pPr>
             <a:r>
-              <a:rPr lang="en-US" sz="1700" b="1" dirty="0">
+              <a:rPr lang="en-US" sz="1700" dirty="0">
                 <a:solidFill>
                   <a:srgbClr val="2D2D2D"/>
                 </a:solidFill>
@@ -2758,18 +2758,7 @@
                 <a:ea typeface="Calibri" pitchFamily="34" charset="-122"/>
                 <a:cs typeface="Calibri" pitchFamily="34" charset="-120"/>
               </a:rPr>
-              <a:t>Low performers: </a:t>
-            </a:r>
-            <a:r>
-              <a:rPr lang="en-US" sz="1700" dirty="0">
-                <a:solidFill>
-                  <a:srgbClr val="2D2D2D"/>
-                </a:solidFill>
-                <a:latin typeface="Calibri" pitchFamily="34" charset="0"/>
-                <a:ea typeface="Calibri" pitchFamily="34" charset="-122"/>
-                <a:cs typeface="Calibri" pitchFamily="34" charset="-120"/>
-              </a:rPr>
-              <a:t>still ship between once a month and once every six months, with recovery often taking a week or more.</a:t>
+              <a:t>Many other organizations still need weeks or months to develop a change, and then weeks or months more to deploy it, often with poor outcomes.</a:t>
             </a:r>
             <a:endParaRPr lang="en-US" sz="1700" dirty="0"/>
           </a:p>
@@ -2842,7 +2831,7 @@
               <a:buNone/>
             </a:pPr>
             <a:r>
-              <a:rPr lang="en-US" sz="1700" b="1" dirty="0">
+              <a:rPr lang="en-US" sz="1700" dirty="0">
                 <a:solidFill>
                   <a:srgbClr val="2D2D2D"/>
                 </a:solidFill>
@@ -2850,18 +2839,7 @@
                 <a:ea typeface="Calibri" pitchFamily="34" charset="-122"/>
                 <a:cs typeface="Calibri" pitchFamily="34" charset="-120"/>
               </a:rPr>
-              <a:t>Speed and stability move together: </a:t>
-            </a:r>
-            <a:r>
-              <a:rPr lang="en-US" sz="1700" dirty="0">
-                <a:solidFill>
-                  <a:srgbClr val="2D2D2D"/>
-                </a:solidFill>
-                <a:latin typeface="Calibri" pitchFamily="34" charset="0"/>
-                <a:ea typeface="Calibri" pitchFamily="34" charset="-122"/>
-                <a:cs typeface="Calibri" pitchFamily="34" charset="-120"/>
-              </a:rPr>
-              <a:t>elite performers combine frequent deployment with change failure rates near 0–15%, while low performers run 46–60% (Forsgren, Humble &amp; Kim, 2019). Faster is not riskier here — it is safer.</a:t>
+              <a:t>The book frames agility and reliability as goals reached together, not traded off against each other, once flow, feedback, and continual learning are in place.</a:t>
             </a:r>
             <a:endParaRPr lang="en-US" sz="1700" dirty="0"/>
           </a:p>
@@ -2934,7 +2912,7 @@
               <a:buNone/>
             </a:pPr>
             <a:r>
-              <a:rPr lang="en-US" sz="1700" b="1" dirty="0">
+              <a:rPr lang="en-US" sz="1700" dirty="0">
                 <a:solidFill>
                   <a:srgbClr val="2D2D2D"/>
                 </a:solidFill>
@@ -2942,18 +2920,7 @@
                 <a:ea typeface="Calibri" pitchFamily="34" charset="-122"/>
                 <a:cs typeface="Calibri" pitchFamily="34" charset="-120"/>
               </a:rPr>
-              <a:t>The gap: </a:t>
-            </a:r>
-            <a:r>
-              <a:rPr lang="en-US" sz="1700" dirty="0">
-                <a:solidFill>
-                  <a:srgbClr val="2D2D2D"/>
-                </a:solidFill>
-                <a:latin typeface="Calibri" pitchFamily="34" charset="0"/>
-                <a:ea typeface="Calibri" pitchFamily="34" charset="-122"/>
-                <a:cs typeface="Calibri" pitchFamily="34" charset="-120"/>
-              </a:rPr>
-              <a:t>the technology value stream framework explains why this gap is structural rather than a matter of individual effort, and identifies exactly where in the pipeline it can be closed.</a:t>
+              <a:t>The technology value stream framework explains why this gap is structural rather than a matter of individual effort, and it identifies exactly where in the pipeline the gap can be closed.</a:t>
             </a:r>
             <a:endParaRPr lang="en-US" sz="1700" dirty="0"/>
           </a:p>
@@ -2992,7 +2959,7 @@
                 <a:ea typeface="Calibri" pitchFamily="34" charset="-122"/>
                 <a:cs typeface="Calibri" pitchFamily="34" charset="-120"/>
               </a:rPr>
-              <a:t>Source: Forsgren, Humble &amp; Kim (2019), Accelerate State of DevOps Report</a:t>
+              <a:t>Source: Kim, Humble, Debois &amp; Willis (2016)</a:t>
             </a:r>
             <a:endParaRPr lang="en-US" sz="1250" dirty="0"/>
           </a:p>
@@ -3363,7 +3330,7 @@
                 <a:ea typeface="Calibri" pitchFamily="34" charset="-122"/>
                 <a:cs typeface="Calibri" pitchFamily="34" charset="-120"/>
               </a:rPr>
-              <a:t>focuses on three measurable properties of that stream — lead time, process time, and percent complete and accurate — and the two documented endpoints they produce: deployments measured in months, and deployments measured in minutes.</a:t>
+              <a:t>focuses on three measurable properties of that stream (lead time, process time, and percent complete and accurate) and the two documented endpoints they produce: deployments measured in months, and deployments measured in minutes.</a:t>
             </a:r>
             <a:endParaRPr lang="en-US" sz="1700" dirty="0"/>
           </a:p>
@@ -3928,7 +3895,7 @@
         <p:spPr>
           <a:xfrm>
             <a:off x="7680960" y="2331720"/>
-            <a:ext cx="237744" cy="960120"/>
+            <a:ext cx="237744" cy="1005840"/>
           </a:xfrm>
           <a:prstGeom prst="rect">
             <a:avLst/>
@@ -3967,7 +3934,7 @@
         <p:spPr>
           <a:xfrm>
             <a:off x="7918704" y="2331720"/>
-            <a:ext cx="3602736" cy="960120"/>
+            <a:ext cx="3602736" cy="1005840"/>
           </a:xfrm>
           <a:prstGeom prst="rect">
             <a:avLst/>
@@ -4019,8 +3986,8 @@
         </p:nvSpPr>
         <p:spPr>
           <a:xfrm>
-            <a:off x="7680960" y="3291840"/>
-            <a:ext cx="237744" cy="960120"/>
+            <a:off x="7680960" y="3337560"/>
+            <a:ext cx="237744" cy="1005840"/>
           </a:xfrm>
           <a:prstGeom prst="rect">
             <a:avLst/>
@@ -4058,8 +4025,8 @@
         </p:nvSpPr>
         <p:spPr>
           <a:xfrm>
-            <a:off x="7918704" y="3291840"/>
-            <a:ext cx="3602736" cy="960120"/>
+            <a:off x="7918704" y="3337560"/>
+            <a:ext cx="3602736" cy="1005840"/>
           </a:xfrm>
           <a:prstGeom prst="rect">
             <a:avLst/>
@@ -4097,7 +4064,7 @@
                 <a:ea typeface="Calibri" pitchFamily="34" charset="-122"/>
                 <a:cs typeface="Calibri" pitchFamily="34" charset="-120"/>
               </a:rPr>
-              <a:t>starts only once work begins — excludes queue wait; this is what the team's effort actually costs.</a:t>
+              <a:t>starts only once work begins, excluding queue wait; this is what the team's effort actually costs.</a:t>
             </a:r>
             <a:endParaRPr lang="en-US" sz="1700" dirty="0"/>
           </a:p>
@@ -4111,8 +4078,8 @@
         </p:nvSpPr>
         <p:spPr>
           <a:xfrm>
-            <a:off x="7680960" y="4251960"/>
-            <a:ext cx="237744" cy="960120"/>
+            <a:off x="7680960" y="4343400"/>
+            <a:ext cx="237744" cy="1005840"/>
           </a:xfrm>
           <a:prstGeom prst="rect">
             <a:avLst/>
@@ -4150,8 +4117,8 @@
         </p:nvSpPr>
         <p:spPr>
           <a:xfrm>
-            <a:off x="7918704" y="4251960"/>
-            <a:ext cx="3602736" cy="960120"/>
+            <a:off x="7918704" y="4343400"/>
+            <a:ext cx="3602736" cy="1005840"/>
           </a:xfrm>
           <a:prstGeom prst="rect">
             <a:avLst/>
@@ -4170,7 +4137,7 @@
               <a:buNone/>
             </a:pPr>
             <a:r>
-              <a:rPr lang="en-US" sz="1700" b="1" dirty="0">
+              <a:rPr lang="en-US" sz="1700" dirty="0">
                 <a:solidFill>
                   <a:srgbClr val="2D2D2D"/>
                 </a:solidFill>
@@ -4178,18 +4145,7 @@
                 <a:ea typeface="Calibri" pitchFamily="34" charset="-122"/>
                 <a:cs typeface="Calibri" pitchFamily="34" charset="-120"/>
               </a:rPr>
-              <a:t>Why it matters: </a:t>
-            </a:r>
-            <a:r>
-              <a:rPr lang="en-US" sz="1700" dirty="0">
-                <a:solidFill>
-                  <a:srgbClr val="2D2D2D"/>
-                </a:solidFill>
-                <a:latin typeface="Calibri" pitchFamily="34" charset="0"/>
-                <a:ea typeface="Calibri" pitchFamily="34" charset="-122"/>
-                <a:cs typeface="Calibri" pitchFamily="34" charset="-120"/>
-              </a:rPr>
-              <a:t>most real-world lead time is queue wait, not work — speeding up the work alone rarely fixes a slow value stream.</a:t>
+              <a:t>Most real-world lead time is queue wait, not work. Speeding up the work alone rarely fixes a slow value stream.</a:t>
             </a:r>
             <a:endParaRPr lang="en-US" sz="1700" dirty="0"/>
           </a:p>
@@ -4228,7 +4184,7 @@
                 <a:ea typeface="Calibri" pitchFamily="34" charset="-122"/>
                 <a:cs typeface="Calibri" pitchFamily="34" charset="-120"/>
               </a:rPr>
-              <a:t>Source: Kim, Humble, Debois &amp; Willis (2016), p. 9</a:t>
+              <a:t>Source: Kim, Humble, Debois &amp; Willis (2016), p. 51</a:t>
             </a:r>
             <a:endParaRPr lang="en-US" sz="1250" dirty="0"/>
           </a:p>
@@ -4415,7 +4371,7 @@
               <a:buNone/>
             </a:pPr>
             <a:r>
-              <a:rPr lang="en-US" sz="1700" b="1" dirty="0">
+              <a:rPr lang="en-US" sz="1700" dirty="0">
                 <a:solidFill>
                   <a:srgbClr val="2D2D2D"/>
                 </a:solidFill>
@@ -4423,18 +4379,7 @@
                 <a:ea typeface="Calibri" pitchFamily="34" charset="-122"/>
                 <a:cs typeface="Calibri" pitchFamily="34" charset="-120"/>
               </a:rPr>
-              <a:t>%C/A: </a:t>
-            </a:r>
-            <a:r>
-              <a:rPr lang="en-US" sz="1700" dirty="0">
-                <a:solidFill>
-                  <a:srgbClr val="2D2D2D"/>
-                </a:solidFill>
-                <a:latin typeface="Calibri" pitchFamily="34" charset="0"/>
-                <a:ea typeface="Calibri" pitchFamily="34" charset="-122"/>
-                <a:cs typeface="Calibri" pitchFamily="34" charset="-120"/>
-              </a:rPr>
-              <a:t>the share of a step's output the next step can use without rework, correction, or added information.</a:t>
+              <a:t>%C/A: the share of a step's output the next step can use without rework, correction, or added information.</a:t>
             </a:r>
             <a:endParaRPr lang="en-US" sz="1700" dirty="0"/>
           </a:p>
@@ -4507,7 +4452,7 @@
               <a:buNone/>
             </a:pPr>
             <a:r>
-              <a:rPr lang="en-US" sz="1700" b="1" dirty="0">
+              <a:rPr lang="en-US" sz="1700" dirty="0">
                 <a:solidFill>
                   <a:srgbClr val="2D2D2D"/>
                 </a:solidFill>
@@ -4515,18 +4460,7 @@
                 <a:ea typeface="Calibri" pitchFamily="34" charset="-122"/>
                 <a:cs typeface="Calibri" pitchFamily="34" charset="-120"/>
               </a:rPr>
-              <a:t>Example: </a:t>
-            </a:r>
-            <a:r>
-              <a:rPr lang="en-US" sz="1700" dirty="0">
-                <a:solidFill>
-                  <a:srgbClr val="2D2D2D"/>
-                </a:solidFill>
-                <a:latin typeface="Calibri" pitchFamily="34" charset="0"/>
-                <a:ea typeface="Calibri" pitchFamily="34" charset="-122"/>
-                <a:cs typeface="Calibri" pitchFamily="34" charset="-120"/>
-              </a:rPr>
-              <a:t>a design handed off with missing specs may be “100% complete” but 0% accurate — the next step still has to chase down what's missing before it can proceed.</a:t>
+              <a:t>A design handed off with missing specs might be "100% complete" but 0% accurate. The next step still has to chase down what's missing before it can proceed.</a:t>
             </a:r>
             <a:endParaRPr lang="en-US" sz="1700" dirty="0"/>
           </a:p>
@@ -4599,7 +4533,7 @@
               <a:buNone/>
             </a:pPr>
             <a:r>
-              <a:rPr lang="en-US" sz="1700" b="1" dirty="0">
+              <a:rPr lang="en-US" sz="1700" dirty="0">
                 <a:solidFill>
                   <a:srgbClr val="2D2D2D"/>
                 </a:solidFill>
@@ -4607,18 +4541,7 @@
                 <a:ea typeface="Calibri" pitchFamily="34" charset="-122"/>
                 <a:cs typeface="Calibri" pitchFamily="34" charset="-120"/>
               </a:rPr>
-              <a:t>Low %C/A: </a:t>
-            </a:r>
-            <a:r>
-              <a:rPr lang="en-US" sz="1700" dirty="0">
-                <a:solidFill>
-                  <a:srgbClr val="2D2D2D"/>
-                </a:solidFill>
-                <a:latin typeface="Calibri" pitchFamily="34" charset="0"/>
-                <a:ea typeface="Calibri" pitchFamily="34" charset="-122"/>
-                <a:cs typeface="Calibri" pitchFamily="34" charset="-120"/>
-              </a:rPr>
-              <a:t>hides extra work that lengthens lead time even when a step looks fast on paper.</a:t>
+              <a:t>Low %C/A hides extra work that lengthens lead time even when a step looks fast on paper.</a:t>
             </a:r>
             <a:endParaRPr lang="en-US" sz="1700" dirty="0"/>
           </a:p>
@@ -4691,7 +4614,7 @@
               <a:buNone/>
             </a:pPr>
             <a:r>
-              <a:rPr lang="en-US" sz="1700" b="1" dirty="0">
+              <a:rPr lang="en-US" sz="1700" dirty="0">
                 <a:solidFill>
                   <a:srgbClr val="2D2D2D"/>
                 </a:solidFill>
@@ -4699,18 +4622,7 @@
                 <a:ea typeface="Calibri" pitchFamily="34" charset="-122"/>
                 <a:cs typeface="Calibri" pitchFamily="34" charset="-120"/>
               </a:rPr>
-              <a:t>Together: </a:t>
-            </a:r>
-            <a:r>
-              <a:rPr lang="en-US" sz="1700" dirty="0">
-                <a:solidFill>
-                  <a:srgbClr val="2D2D2D"/>
-                </a:solidFill>
-                <a:latin typeface="Calibri" pitchFamily="34" charset="0"/>
-                <a:ea typeface="Calibri" pitchFamily="34" charset="-122"/>
-                <a:cs typeface="Calibri" pitchFamily="34" charset="-120"/>
-              </a:rPr>
-              <a:t>lead time, process time, and %C/A jointly describe both the speed and the quality of flow through the whole value stream.</a:t>
+              <a:t>Together, lead time, process time, and %C/A describe both the speed and the quality of flow through the whole value stream.</a:t>
             </a:r>
             <a:endParaRPr lang="en-US" sz="1700" dirty="0"/>
           </a:p>
@@ -4749,7 +4661,7 @@
                 <a:ea typeface="Calibri" pitchFamily="34" charset="-122"/>
                 <a:cs typeface="Calibri" pitchFamily="34" charset="-120"/>
               </a:rPr>
-              <a:t>Source: Kim, Humble, Debois &amp; Willis (2016), pp. 9–10</a:t>
+              <a:t>Source: Kim, Humble, Debois &amp; Willis (2016), pp. 52–53</a:t>
             </a:r>
             <a:endParaRPr lang="en-US" sz="1250" dirty="0"/>
           </a:p>
@@ -6044,7 +5956,7 @@
                 <a:ea typeface="Calibri" pitchFamily="34" charset="-122"/>
                 <a:cs typeface="Calibri" pitchFamily="34" charset="-120"/>
               </a:rPr>
-              <a:t>Source: Kim et al. (2016), p. 10, concept after Edwards, “DevOps Kaizen” (2015)</a:t>
+              <a:t>Source: Kim, Humble, Debois &amp; Willis (2016), pp. 51-52</a:t>
             </a:r>
             <a:endParaRPr lang="en-US" sz="1250" dirty="0"/>
           </a:p>
@@ -6788,7 +6700,7 @@
                 <a:ea typeface="Calibri" pitchFamily="34" charset="-122"/>
                 <a:cs typeface="Calibri" pitchFamily="34" charset="-120"/>
               </a:rPr>
-              <a:t>Minutes — or hours, at worst</a:t>
+              <a:t>Minutes, or hours at worst</a:t>
             </a:r>
             <a:endParaRPr lang="en-US" sz="1500" dirty="0"/>
           </a:p>
@@ -7151,7 +7063,7 @@
                 <a:ea typeface="Calibri" pitchFamily="34" charset="-122"/>
                 <a:cs typeface="Calibri" pitchFamily="34" charset="-120"/>
               </a:rPr>
-              <a:t>Because each change is small, there is little for any single step to get wrong — %C/A stays high.</a:t>
+              <a:t>Because each change is small, there is little for any single step to get wrong, so %C/A stays high.</a:t>
             </a:r>
             <a:endParaRPr lang="en-US" sz="1700" dirty="0"/>
           </a:p>
@@ -7190,7 +7102,7 @@
                 <a:ea typeface="Calibri" pitchFamily="34" charset="-122"/>
                 <a:cs typeface="Calibri" pitchFamily="34" charset="-120"/>
               </a:rPr>
-              <a:t>Source: Kim et al. (2016), p. 10</a:t>
+              <a:t>Source: Kim, Humble, Debois &amp; Willis (2016), p. 52</a:t>
             </a:r>
             <a:endParaRPr lang="en-US" sz="1250" dirty="0"/>
           </a:p>
@@ -7304,7 +7216,7 @@
                 <a:ea typeface="Calibri" pitchFamily="34" charset="-122"/>
                 <a:cs typeface="Calibri" pitchFamily="34" charset="-120"/>
               </a:rPr>
-              <a:t>Elite performers deploy roughly 208 times more often than low performers doing the same work</a:t>
+              <a:t>Amazon's own deployment frequency grew more than eighteenfold in four years after adopting these practices</a:t>
             </a:r>
             <a:endParaRPr lang="en-US" sz="2600" dirty="0"/>
           </a:p>
@@ -7393,7 +7305,7 @@
                 <a:ea typeface="Calibri" pitchFamily="34" charset="-122"/>
                 <a:cs typeface="Calibri" pitchFamily="34" charset="-120"/>
               </a:rPr>
-              <a:t>208× more frequent</a:t>
+              <a:t>~130,000 deploys per day</a:t>
             </a:r>
             <a:endParaRPr lang="en-US" sz="1500" dirty="0"/>
           </a:p>
@@ -7447,7 +7359,7 @@
         <p:spPr>
           <a:xfrm>
             <a:off x="7680960" y="2468880"/>
-            <a:ext cx="237744" cy="1051560"/>
+            <a:ext cx="237744" cy="1188720"/>
           </a:xfrm>
           <a:prstGeom prst="rect">
             <a:avLst/>
@@ -7486,7 +7398,7 @@
         <p:spPr>
           <a:xfrm>
             <a:off x="7918704" y="2468880"/>
-            <a:ext cx="3602736" cy="1051560"/>
+            <a:ext cx="3602736" cy="1188720"/>
           </a:xfrm>
           <a:prstGeom prst="rect">
             <a:avLst/>
@@ -7513,7 +7425,7 @@
                 <a:ea typeface="Calibri" pitchFamily="34" charset="-122"/>
                 <a:cs typeface="Calibri" pitchFamily="34" charset="-120"/>
               </a:rPr>
-              <a:t>The frequency gap mirrors the value-stream differences shown on the prior two slides.</a:t>
+              <a:t>Amazon's own history shows how far deployment frequency can scale once flow, feedback, and automation take hold.</a:t>
             </a:r>
             <a:endParaRPr lang="en-US" sz="1700" dirty="0"/>
           </a:p>
@@ -7527,8 +7439,8 @@
         </p:nvSpPr>
         <p:spPr>
           <a:xfrm>
-            <a:off x="7680960" y="3520440"/>
-            <a:ext cx="237744" cy="1051560"/>
+            <a:off x="7680960" y="3657600"/>
+            <a:ext cx="237744" cy="1188720"/>
           </a:xfrm>
           <a:prstGeom prst="rect">
             <a:avLst/>
@@ -7566,8 +7478,8 @@
         </p:nvSpPr>
         <p:spPr>
           <a:xfrm>
-            <a:off x="7918704" y="3520440"/>
-            <a:ext cx="3602736" cy="1051560"/>
+            <a:off x="7918704" y="3657600"/>
+            <a:ext cx="3602736" cy="1188720"/>
           </a:xfrm>
           <a:prstGeom prst="rect">
             <a:avLst/>
@@ -7594,7 +7506,7 @@
                 <a:ea typeface="Calibri" pitchFamily="34" charset="-122"/>
                 <a:cs typeface="Calibri" pitchFamily="34" charset="-120"/>
               </a:rPr>
-              <a:t>Elite performers combine automation, small batches, and modular architecture to get there.</a:t>
+              <a:t>This mirrors the shift from the common scenario to the DevOps ideal described on the two prior slides.</a:t>
             </a:r>
             <a:endParaRPr lang="en-US" sz="1700" dirty="0"/>
           </a:p>
@@ -7608,8 +7520,8 @@
         </p:nvSpPr>
         <p:spPr>
           <a:xfrm>
-            <a:off x="7680960" y="4572000"/>
-            <a:ext cx="237744" cy="1051560"/>
+            <a:off x="7680960" y="4846320"/>
+            <a:ext cx="237744" cy="1188720"/>
           </a:xfrm>
           <a:prstGeom prst="rect">
             <a:avLst/>
@@ -7647,8 +7559,8 @@
         </p:nvSpPr>
         <p:spPr>
           <a:xfrm>
-            <a:off x="7918704" y="4572000"/>
-            <a:ext cx="3602736" cy="1051560"/>
+            <a:off x="7918704" y="4846320"/>
+            <a:ext cx="3602736" cy="1188720"/>
           </a:xfrm>
           <a:prstGeom prst="rect">
             <a:avLst/>
@@ -7675,7 +7587,7 @@
                 <a:ea typeface="Calibri" pitchFamily="34" charset="-122"/>
                 <a:cs typeface="Calibri" pitchFamily="34" charset="-120"/>
               </a:rPr>
-              <a:t>The same research finds elite performers report change failure rates near 0–15%, versus 46–60% for low performers — speed and stability move together.</a:t>
+              <a:t>The book presents this alongside similar examples from Google and Netflix as evidence that the shift is repeatable.</a:t>
             </a:r>
             <a:endParaRPr lang="en-US" sz="1700" dirty="0"/>
           </a:p>
@@ -7702,9 +7614,6 @@
           <a:bodyPr wrap="square" lIns="0" tIns="0" rIns="0" bIns="0" rtlCol="0" anchor="ctr"/>
           <a:lstStyle/>
           <a:p>
-            <a:pPr marL="0" indent="0">
-              <a:buNone/>
-            </a:pPr>
             <a:r>
               <a:rPr lang="en-US" sz="1250" dirty="0">
                 <a:solidFill>
@@ -7714,7 +7623,7 @@
                 <a:ea typeface="Calibri" pitchFamily="34" charset="-122"/>
                 <a:cs typeface="Calibri" pitchFamily="34" charset="-120"/>
               </a:rPr>
-              <a:t>Source: Forsgren, Humble &amp; Kim (2019), Accelerate State of DevOps Report</a:t>
+              <a:t>Source: Kim, Humble, Debois &amp; Willis (2016), p. 39; p. 42 </a:t>
             </a:r>
             <a:endParaRPr lang="en-US" sz="1250" dirty="0"/>
           </a:p>
@@ -8110,7 +8019,7 @@
                 <a:ea typeface="Calibri" pitchFamily="34" charset="-122"/>
                 <a:cs typeface="Calibri" pitchFamily="34" charset="-120"/>
               </a:rPr>
-              <a:t>Because speed and stability move together in the data, faster deployment should not be read as a trade-off against reliability.</a:t>
+              <a:t>Amazon's own growth in deployment frequency shows this is achieved without abandoning reliability as a goal.</a:t>
             </a:r>
             <a:endParaRPr lang="en-US" sz="1700" dirty="0"/>
           </a:p>
@@ -8222,7 +8131,7 @@
               <a:buNone/>
             </a:pPr>
             <a:r>
-              <a:rPr lang="en-US" sz="1700" b="1" dirty="0">
+              <a:rPr lang="en-US" sz="1700" dirty="0">
                 <a:solidFill>
                   <a:srgbClr val="2D2D2D"/>
                 </a:solidFill>
@@ -8230,18 +8139,7 @@
                 <a:ea typeface="Calibri" pitchFamily="34" charset="-122"/>
                 <a:cs typeface="Calibri" pitchFamily="34" charset="-120"/>
               </a:rPr>
-              <a:t>Scope: </a:t>
-            </a:r>
-            <a:r>
-              <a:rPr lang="en-US" sz="1700" dirty="0">
-                <a:solidFill>
-                  <a:srgbClr val="2D2D2D"/>
-                </a:solidFill>
-                <a:latin typeface="Calibri" pitchFamily="34" charset="0"/>
-                <a:ea typeface="Calibri" pitchFamily="34" charset="-122"/>
-                <a:cs typeface="Calibri" pitchFamily="34" charset="-120"/>
-              </a:rPr>
-              <a:t>this review synthesizes documented patterns and industry survey data; it does not measure causal impact for any single organization.</a:t>
+              <a:t>This review draws on a single source and its own reported examples; it does not independently verify causal impact for any organization.</a:t>
             </a:r>
             <a:endParaRPr lang="en-US" sz="1700" dirty="0"/>
           </a:p>
@@ -8314,7 +8212,7 @@
               <a:buNone/>
             </a:pPr>
             <a:r>
-              <a:rPr lang="en-US" sz="1700" b="1" dirty="0">
+              <a:rPr lang="en-US" sz="1700" dirty="0">
                 <a:solidFill>
                   <a:srgbClr val="2D2D2D"/>
                 </a:solidFill>
@@ -8322,18 +8220,7 @@
                 <a:ea typeface="Calibri" pitchFamily="34" charset="-122"/>
                 <a:cs typeface="Calibri" pitchFamily="34" charset="-120"/>
               </a:rPr>
-              <a:t>Context: </a:t>
-            </a:r>
-            <a:r>
-              <a:rPr lang="en-US" sz="1700" dirty="0">
-                <a:solidFill>
-                  <a:srgbClr val="2D2D2D"/>
-                </a:solidFill>
-                <a:latin typeface="Calibri" pitchFamily="34" charset="0"/>
-                <a:ea typeface="Calibri" pitchFamily="34" charset="-122"/>
-                <a:cs typeface="Calibri" pitchFamily="34" charset="-120"/>
-              </a:rPr>
-              <a:t>specific constraints, and how much each one contributes to lead time, vary by architecture, regulatory environment, and team maturity.</a:t>
+              <a:t>Specific constraints, and how much each one contributes to lead time, vary by architecture, regulatory environment, and team maturity.</a:t>
             </a:r>
             <a:endParaRPr lang="en-US" sz="1700" dirty="0"/>
           </a:p>
